--- a/Day 3 Part 4/D1P4.pptx
+++ b/Day 3 Part 4/D1P4.pptx
@@ -222,12 +222,20 @@
 </p188:authorLst>
 </file>
 
+<file path=ppt/revisionInfo.xml><?xml version="1.0" encoding="utf-8"?>
+<p1510:revInfo xmlns:a="http://schemas.openxmlformats.org/drawingml/2006/main" xmlns:r="http://schemas.openxmlformats.org/officeDocument/2006/relationships" xmlns:p1510="http://schemas.microsoft.com/office/powerpoint/2015/10/main">
+  <p1510:revLst>
+    <p1510:client id="{B10568F3-3AFD-4520-AC34-FCBD3FBC51DF}" v="4" dt="2026-03-18T05:39:57.215"/>
+  </p1510:revLst>
+</p1510:revInfo>
+</file>
+
 <file path=ppt/changesInfos/changesInfo1.xml><?xml version="1.0" encoding="utf-8"?>
 <pc:chgInfo xmlns:a="http://schemas.openxmlformats.org/drawingml/2006/main" xmlns:r="http://schemas.openxmlformats.org/officeDocument/2006/relationships" xmlns:ac="http://schemas.microsoft.com/office/drawing/2013/main/command" xmlns:pc="http://schemas.microsoft.com/office/powerpoint/2013/main/command">
   <pc:docChgLst>
     <pc:chgData name="Matthieu De Mari" userId="dfb708c9-d8dc-439f-9a3b-c772bf4a311c" providerId="ADAL" clId="{81E9B007-0C2C-493E-9B93-55A62C9C1F12}"/>
     <pc:docChg chg="undo custSel addSld delSld modSld sldOrd addSection delSection modSection">
-      <pc:chgData name="Matthieu De Mari" userId="dfb708c9-d8dc-439f-9a3b-c772bf4a311c" providerId="ADAL" clId="{81E9B007-0C2C-493E-9B93-55A62C9C1F12}" dt="2026-03-15T15:03:30.852" v="1027" actId="20577"/>
+      <pc:chgData name="Matthieu De Mari" userId="dfb708c9-d8dc-439f-9a3b-c772bf4a311c" providerId="ADAL" clId="{81E9B007-0C2C-493E-9B93-55A62C9C1F12}" dt="2026-03-18T05:40:10.794" v="1076" actId="20577"/>
       <pc:docMkLst>
         <pc:docMk/>
       </pc:docMkLst>
@@ -243,6 +251,29 @@
             <pc:docMk/>
             <pc:sldMk cId="4272836236" sldId="548"/>
             <ac:spMk id="5" creationId="{8784BD3C-A362-227F-DB67-10CF1E267B66}"/>
+          </ac:spMkLst>
+        </pc:spChg>
+      </pc:sldChg>
+      <pc:sldChg chg="modSp mod modClrScheme chgLayout">
+        <pc:chgData name="Matthieu De Mari" userId="dfb708c9-d8dc-439f-9a3b-c772bf4a311c" providerId="ADAL" clId="{81E9B007-0C2C-493E-9B93-55A62C9C1F12}" dt="2026-03-18T05:40:10.794" v="1076" actId="20577"/>
+        <pc:sldMkLst>
+          <pc:docMk/>
+          <pc:sldMk cId="2100063369" sldId="598"/>
+        </pc:sldMkLst>
+        <pc:spChg chg="mod ord">
+          <ac:chgData name="Matthieu De Mari" userId="dfb708c9-d8dc-439f-9a3b-c772bf4a311c" providerId="ADAL" clId="{81E9B007-0C2C-493E-9B93-55A62C9C1F12}" dt="2026-03-18T05:33:29.849" v="1028" actId="700"/>
+          <ac:spMkLst>
+            <pc:docMk/>
+            <pc:sldMk cId="2100063369" sldId="598"/>
+            <ac:spMk id="2" creationId="{B511B8E6-E8AC-E2AA-8587-37211257C3EA}"/>
+          </ac:spMkLst>
+        </pc:spChg>
+        <pc:spChg chg="mod ord">
+          <ac:chgData name="Matthieu De Mari" userId="dfb708c9-d8dc-439f-9a3b-c772bf4a311c" providerId="ADAL" clId="{81E9B007-0C2C-493E-9B93-55A62C9C1F12}" dt="2026-03-18T05:40:10.794" v="1076" actId="20577"/>
+          <ac:spMkLst>
+            <pc:docMk/>
+            <pc:sldMk cId="2100063369" sldId="598"/>
+            <ac:spMk id="3" creationId="{0AF75346-FFC2-1F4C-D9E7-43CE81DA4C3C}"/>
           </ac:spMkLst>
         </pc:spChg>
       </pc:sldChg>
@@ -5561,7 +5592,7 @@
           <a:p>
             <a:fld id="{61478373-EB31-4867-8CF0-FA31364748A5}" type="datetimeFigureOut">
               <a:rPr lang="en-GB" smtClean="0"/>
-              <a:t>15/03/2026</a:t>
+              <a:t>18/03/2026</a:t>
             </a:fld>
             <a:endParaRPr lang="en-GB"/>
           </a:p>
@@ -5978,7 +6009,7 @@
           <a:p>
             <a:fld id="{E85DF616-B21E-4EF6-A6A5-95E2FB3EB1A1}" type="datetimeFigureOut">
               <a:rPr lang="en-GB" smtClean="0"/>
-              <a:t>15/03/2026</a:t>
+              <a:t>18/03/2026</a:t>
             </a:fld>
             <a:endParaRPr lang="en-GB"/>
           </a:p>
@@ -6178,7 +6209,7 @@
           <a:p>
             <a:fld id="{E85DF616-B21E-4EF6-A6A5-95E2FB3EB1A1}" type="datetimeFigureOut">
               <a:rPr lang="en-GB" smtClean="0"/>
-              <a:t>15/03/2026</a:t>
+              <a:t>18/03/2026</a:t>
             </a:fld>
             <a:endParaRPr lang="en-GB"/>
           </a:p>
@@ -6388,7 +6419,7 @@
           <a:p>
             <a:fld id="{E85DF616-B21E-4EF6-A6A5-95E2FB3EB1A1}" type="datetimeFigureOut">
               <a:rPr lang="en-GB" smtClean="0"/>
-              <a:t>15/03/2026</a:t>
+              <a:t>18/03/2026</a:t>
             </a:fld>
             <a:endParaRPr lang="en-GB"/>
           </a:p>
@@ -6588,7 +6619,7 @@
           <a:p>
             <a:fld id="{E85DF616-B21E-4EF6-A6A5-95E2FB3EB1A1}" type="datetimeFigureOut">
               <a:rPr lang="en-GB" smtClean="0"/>
-              <a:t>15/03/2026</a:t>
+              <a:t>18/03/2026</a:t>
             </a:fld>
             <a:endParaRPr lang="en-GB"/>
           </a:p>
@@ -6864,7 +6895,7 @@
           <a:p>
             <a:fld id="{E85DF616-B21E-4EF6-A6A5-95E2FB3EB1A1}" type="datetimeFigureOut">
               <a:rPr lang="en-GB" smtClean="0"/>
-              <a:t>15/03/2026</a:t>
+              <a:t>18/03/2026</a:t>
             </a:fld>
             <a:endParaRPr lang="en-GB"/>
           </a:p>
@@ -7132,7 +7163,7 @@
           <a:p>
             <a:fld id="{E85DF616-B21E-4EF6-A6A5-95E2FB3EB1A1}" type="datetimeFigureOut">
               <a:rPr lang="en-GB" smtClean="0"/>
-              <a:t>15/03/2026</a:t>
+              <a:t>18/03/2026</a:t>
             </a:fld>
             <a:endParaRPr lang="en-GB"/>
           </a:p>
@@ -7547,7 +7578,7 @@
           <a:p>
             <a:fld id="{E85DF616-B21E-4EF6-A6A5-95E2FB3EB1A1}" type="datetimeFigureOut">
               <a:rPr lang="en-GB" smtClean="0"/>
-              <a:t>15/03/2026</a:t>
+              <a:t>18/03/2026</a:t>
             </a:fld>
             <a:endParaRPr lang="en-GB"/>
           </a:p>
@@ -7689,7 +7720,7 @@
           <a:p>
             <a:fld id="{E85DF616-B21E-4EF6-A6A5-95E2FB3EB1A1}" type="datetimeFigureOut">
               <a:rPr lang="en-GB" smtClean="0"/>
-              <a:t>15/03/2026</a:t>
+              <a:t>18/03/2026</a:t>
             </a:fld>
             <a:endParaRPr lang="en-GB"/>
           </a:p>
@@ -7802,7 +7833,7 @@
           <a:p>
             <a:fld id="{E85DF616-B21E-4EF6-A6A5-95E2FB3EB1A1}" type="datetimeFigureOut">
               <a:rPr lang="en-GB" smtClean="0"/>
-              <a:t>15/03/2026</a:t>
+              <a:t>18/03/2026</a:t>
             </a:fld>
             <a:endParaRPr lang="en-GB"/>
           </a:p>
@@ -8115,7 +8146,7 @@
           <a:p>
             <a:fld id="{E85DF616-B21E-4EF6-A6A5-95E2FB3EB1A1}" type="datetimeFigureOut">
               <a:rPr lang="en-GB" smtClean="0"/>
-              <a:t>15/03/2026</a:t>
+              <a:t>18/03/2026</a:t>
             </a:fld>
             <a:endParaRPr lang="en-GB"/>
           </a:p>
@@ -8404,7 +8435,7 @@
           <a:p>
             <a:fld id="{E85DF616-B21E-4EF6-A6A5-95E2FB3EB1A1}" type="datetimeFigureOut">
               <a:rPr lang="en-GB" smtClean="0"/>
-              <a:t>15/03/2026</a:t>
+              <a:t>18/03/2026</a:t>
             </a:fld>
             <a:endParaRPr lang="en-GB"/>
           </a:p>
@@ -8647,7 +8678,7 @@
           <a:p>
             <a:fld id="{E85DF616-B21E-4EF6-A6A5-95E2FB3EB1A1}" type="datetimeFigureOut">
               <a:rPr lang="en-GB" smtClean="0"/>
-              <a:t>15/03/2026</a:t>
+              <a:t>18/03/2026</a:t>
             </a:fld>
             <a:endParaRPr lang="en-GB"/>
           </a:p>
@@ -17483,15 +17514,10 @@
             <a:spLocks noGrp="1"/>
           </p:cNvSpPr>
           <p:nvPr>
-            <p:ph sz="half" idx="1"/>
+            <p:ph idx="1"/>
           </p:nvPr>
         </p:nvSpPr>
-        <p:spPr>
-          <a:xfrm>
-            <a:off x="838200" y="1825624"/>
-            <a:ext cx="5181600" cy="5032375"/>
-          </a:xfrm>
-        </p:spPr>
+        <p:spPr/>
         <p:txBody>
           <a:bodyPr>
             <a:normAutofit/>
@@ -17504,9 +17530,12 @@
             </a:r>
           </a:p>
           <a:p>
-            <a:endParaRPr lang="en-GB" dirty="0"/>
-          </a:p>
-          <a:p>
+            <a:r>
+              <a:rPr lang="en-GB" dirty="0">
+                <a:hlinkClick r:id="rId2"/>
+              </a:rPr>
+              <a:t>https://docs.google.com/forms/d/e/1FAIpQLSc3ELZLUOcNx6C5tcBjDMedLL-qILEWsb5TJ906ytdxORm8Kg/viewform?usp=publish-editor</a:t>
+            </a:r>
             <a:endParaRPr lang="en-GB" dirty="0"/>
           </a:p>
           <a:p>
@@ -17516,26 +17545,55 @@
             <a:endParaRPr lang="en-GB" dirty="0"/>
           </a:p>
           <a:p>
-            <a:pPr marL="0" indent="0">
-              <a:buNone/>
-            </a:pPr>
-            <a:endParaRPr lang="en-GB"/>
-          </a:p>
-          <a:p>
-            <a:pPr marL="0" indent="0">
-              <a:buNone/>
-            </a:pPr>
-            <a:endParaRPr lang="en-GB" dirty="0"/>
-          </a:p>
-          <a:p>
+            <a:r>
+              <a:rPr lang="en-GB" b="1">
+                <a:solidFill>
+                  <a:srgbClr val="C00000"/>
+                </a:solidFill>
+              </a:rPr>
+              <a:t>Deadline for submission: 12 April 2026, </a:t>
+            </a:r>
             <a:r>
               <a:rPr lang="en-GB" b="1" dirty="0">
                 <a:solidFill>
                   <a:srgbClr val="C00000"/>
                 </a:solidFill>
               </a:rPr>
-              <a:t>Deadline: XXXX</a:t>
-            </a:r>
+              <a:t>11.59pm</a:t>
+            </a:r>
+          </a:p>
+          <a:p>
+            <a:r>
+              <a:rPr lang="en-GB" b="1" dirty="0">
+                <a:solidFill>
+                  <a:srgbClr val="C00000"/>
+                </a:solidFill>
+              </a:rPr>
+              <a:t>Note: Please ignore the score shown at the end of the quiz, after submission, as I have not yet fully implemented the </a:t>
+            </a:r>
+            <a:r>
+              <a:rPr lang="en-GB" b="1" dirty="0" err="1">
+                <a:solidFill>
+                  <a:srgbClr val="C00000"/>
+                </a:solidFill>
+              </a:rPr>
+              <a:t>autograder</a:t>
+            </a:r>
+            <a:r>
+              <a:rPr lang="en-GB" b="1" dirty="0">
+                <a:solidFill>
+                  <a:srgbClr val="C00000"/>
+                </a:solidFill>
+              </a:rPr>
+              <a:t>!</a:t>
+            </a:r>
+          </a:p>
+          <a:p>
+            <a:endParaRPr lang="en-GB" b="1" dirty="0">
+              <a:solidFill>
+                <a:srgbClr val="C00000"/>
+              </a:solidFill>
+            </a:endParaRPr>
           </a:p>
         </p:txBody>
       </p:sp>
